--- a/presentaciones/Taller_Practico_1.pptx
+++ b/presentaciones/Taller_Practico_1.pptx
@@ -7611,7 +7611,7 @@
                 <a:ea typeface="Arial" pitchFamily="34" charset="-122"/>
                 <a:cs typeface="Arial" pitchFamily="34" charset="-120"/>
               </a:rPr>
-              <a:t>Paso 10 del notebook · diez minutos para escribir tu propia herramienta</a:t>
+              <a:t>Paso 10 · una herramienta que consulta un catálogo real de 40 millones de libros</a:t>
             </a:r>
             <a:endParaRPr lang="en-US" sz="1400" dirty="0"/>
           </a:p>
@@ -7764,7 +7764,7 @@
                 <a:ea typeface="Montserrat" pitchFamily="34" charset="-122"/>
                 <a:cs typeface="Montserrat" pitchFamily="34" charset="-120"/>
               </a:rPr>
-              <a:t>Ejecuta el ejemplo</a:t>
+              <a:t>Catálogo real</a:t>
             </a:r>
             <a:endParaRPr lang="en-US" sz="1200" dirty="0"/>
           </a:p>
@@ -7806,7 +7806,7 @@
                 <a:ea typeface="Arial" pitchFamily="34" charset="-122"/>
                 <a:cs typeface="Arial" pitchFamily="34" charset="-120"/>
               </a:rPr>
-              <a:t>horario_biblioteca ya funciona. Compruébalo antes de tocar nada.</a:t>
+              <a:t>buscar_libro consulta Open Library de verdad: autor, año y ediciones. Sin llave.</a:t>
             </a:r>
             <a:endParaRPr lang="en-US" sz="1000" dirty="0"/>
           </a:p>
@@ -7939,7 +7939,7 @@
                 <a:ea typeface="Montserrat" pitchFamily="34" charset="-122"/>
                 <a:cs typeface="Montserrat" pitchFamily="34" charset="-120"/>
               </a:rPr>
-              <a:t>Cambia los datos</a:t>
+              <a:t>Cámbiala</a:t>
             </a:r>
             <a:endParaRPr lang="en-US" sz="1200" dirty="0"/>
           </a:p>
@@ -7981,7 +7981,7 @@
                 <a:ea typeface="Arial" pitchFamily="34" charset="-122"/>
                 <a:cs typeface="Arial" pitchFamily="34" charset="-120"/>
               </a:rPr>
-              <a:t>Modifica los horarios y vuelve a preguntar. Verás el cambio de inmediato.</a:t>
+              <a:t>Otro título, otro número de resultados. Los datos que vuelven son reales.</a:t>
             </a:r>
             <a:endParaRPr lang="en-US" sz="1000" dirty="0"/>
           </a:p>
@@ -8289,7 +8289,7 @@
                 <a:ea typeface="Montserrat" pitchFamily="34" charset="-122"/>
                 <a:cs typeface="Montserrat" pitchFamily="34" charset="-120"/>
               </a:rPr>
-              <a:t>Si te sobra tiempo</a:t>
+              <a:t>Otra API</a:t>
             </a:r>
             <a:endParaRPr lang="en-US" sz="1200" dirty="0"/>
           </a:p>
@@ -8331,7 +8331,7 @@
                 <a:ea typeface="Arial" pitchFamily="34" charset="-122"/>
                 <a:cs typeface="Arial" pitchFamily="34" charset="-120"/>
               </a:rPr>
-              <a:t>Escribe una segunda herramienta y mira al agente elegir entre las dos.</a:t>
+              <a:t>Wikipedia, mindicador.cl, feriados de Chile. Todas gratis y sin llave.</a:t>
             </a:r>
             <a:endParaRPr lang="en-US" sz="1000" dirty="0"/>
           </a:p>
@@ -8608,7 +8608,7 @@
                 <a:ea typeface="Arial" pitchFamily="34" charset="-122"/>
                 <a:cs typeface="Arial" pitchFamily="34" charset="-120"/>
               </a:rPr>
-              <a:t>Una herramienta con @tool, un agente que la usa, y la traza ReAct funcionando de verdad en tu pantalla.</a:t>
+              <a:t>Dos herramientas con @tool —el reloj real y un catálogo de 40 millones de libros— y la traza ReAct funcionando.</a:t>
             </a:r>
             <a:endParaRPr lang="en-US" sz="1100" dirty="0"/>
           </a:p>

--- a/presentaciones/Taller_Practico_1.pptx
+++ b/presentaciones/Taller_Practico_1.pptx
@@ -10199,7 +10199,7 @@
                 <a:ea typeface="Arial" pitchFamily="34" charset="-122"/>
                 <a:cs typeface="Arial" pitchFamily="34" charset="-120"/>
               </a:rPr>
-              <a:t>Pasos 1-4 · cuenta de Groq, llave y Secrets de Colab  ·  15 min</a:t>
+              <a:t>Pasos 1-4 · cuenta de Groq, llave y Secrets de Colab  ·  13 min</a:t>
             </a:r>
             <a:endParaRPr lang="en-US" sz="1000" dirty="0"/>
           </a:p>
@@ -10724,7 +10724,7 @@
                 <a:ea typeface="Arial" pitchFamily="34" charset="-122"/>
                 <a:cs typeface="Arial" pitchFamily="34" charset="-120"/>
               </a:rPr>
-              <a:t>Pasos 8-11 · armarlo, ejecutarlo y leer la traza  ·  22 min</a:t>
+              <a:t>Pasos 8-11 · armarlo, ejecutarlo y leer la traza  ·  24 min</a:t>
             </a:r>
             <a:endParaRPr lang="en-US" sz="1000" dirty="0"/>
           </a:p>
